--- a/hoshi-jungle-review-ai/docs/proposal/hoshi-jungle-proposal.pptx
+++ b/hoshi-jungle-review-ai/docs/proposal/hoshi-jungle-proposal.pptx
@@ -4412,8 +4412,8 @@
         </p:blipFill>
         <p:spPr>
           <a:xfrm>
-            <a:off x="6221522" y="566928"/>
-            <a:ext cx="5254198" cy="5669280"/>
+            <a:off x="5829027" y="566928"/>
+            <a:ext cx="5646693" cy="5669280"/>
           </a:xfrm>
           <a:prstGeom prst="rect">
             <a:avLst/>
@@ -4616,12 +4616,12 @@
         </p:nvSpPr>
         <p:spPr>
           <a:xfrm>
-            <a:off x="685800" y="1874520"/>
-            <a:ext cx="5212080" cy="1572768"/>
+            <a:off x="685800" y="1965960"/>
+            <a:ext cx="5212080" cy="1188720"/>
           </a:xfrm>
           <a:prstGeom prst="roundRect">
             <a:avLst>
-              <a:gd name="adj" fmla="val 3488"/>
+              <a:gd name="adj" fmla="val 4615"/>
             </a:avLst>
           </a:prstGeom>
           <a:solidFill>
@@ -4643,7 +4643,7 @@
         </p:nvSpPr>
         <p:spPr>
           <a:xfrm>
-            <a:off x="941832" y="1993392"/>
+            <a:off x="941832" y="2084832"/>
             <a:ext cx="1188720" cy="292608"/>
           </a:xfrm>
           <a:prstGeom prst="rect">
@@ -4682,7 +4682,7 @@
         </p:nvSpPr>
         <p:spPr>
           <a:xfrm>
-            <a:off x="2148840" y="2011680"/>
+            <a:off x="2148840" y="2103120"/>
             <a:ext cx="3474720" cy="274320"/>
           </a:xfrm>
           <a:prstGeom prst="rect">
@@ -4721,8 +4721,8 @@
         </p:nvSpPr>
         <p:spPr>
           <a:xfrm>
-            <a:off x="941832" y="2331720"/>
-            <a:ext cx="4700016" cy="1005840"/>
+            <a:off x="941832" y="2423160"/>
+            <a:ext cx="4700016" cy="640080"/>
           </a:xfrm>
           <a:prstGeom prst="rect">
             <a:avLst/>
@@ -4749,7 +4749,7 @@
                 <a:ea typeface="Yu Gothic" pitchFamily="34" charset="-122"/>
                 <a:cs typeface="Yu Gothic" pitchFamily="34" charset="-120"/>
               </a:rPr>
-              <a:t>ジャングルビューのプールが忘れられません。朝は鳥の声で目が覚めて、夜はカエルの合唱。スタッフの皆さんも本当に温かくて、バリで一番好きな場所になりました。</a:t>
+              <a:t>プールからの景色が最高でした。スタッフの方もとても親切です。また行きたいです。</a:t>
             </a:r>
             <a:endParaRPr lang="en-US" sz="1050" dirty="0"/>
           </a:p>
@@ -4763,7 +4763,7 @@
         </p:nvSpPr>
         <p:spPr>
           <a:xfrm>
-            <a:off x="3017520" y="3474720"/>
+            <a:off x="3017520" y="3246120"/>
             <a:ext cx="548640" cy="274320"/>
           </a:xfrm>
           <a:prstGeom prst="rect">
@@ -4802,12 +4802,12 @@
         </p:nvSpPr>
         <p:spPr>
           <a:xfrm>
-            <a:off x="685800" y="3785616"/>
-            <a:ext cx="5212080" cy="1874520"/>
+            <a:off x="685800" y="3611880"/>
+            <a:ext cx="5212080" cy="2057400"/>
           </a:xfrm>
           <a:prstGeom prst="roundRect">
             <a:avLst>
-              <a:gd name="adj" fmla="val 2927"/>
+              <a:gd name="adj" fmla="val 2667"/>
             </a:avLst>
           </a:prstGeom>
           <a:solidFill>
@@ -4829,7 +4829,7 @@
         </p:nvSpPr>
         <p:spPr>
           <a:xfrm>
-            <a:off x="941832" y="3895344"/>
+            <a:off x="941832" y="3749040"/>
             <a:ext cx="4700016" cy="256032"/>
           </a:xfrm>
           <a:prstGeom prst="rect">
@@ -4868,8 +4868,8 @@
         </p:nvSpPr>
         <p:spPr>
           <a:xfrm>
-            <a:off x="941832" y="4187952"/>
-            <a:ext cx="4700016" cy="1371600"/>
+            <a:off x="941832" y="4059936"/>
+            <a:ext cx="4700016" cy="1508760"/>
           </a:xfrm>
           <a:prstGeom prst="rect">
             <a:avLst/>
@@ -4896,7 +4896,7 @@
                 <a:ea typeface="Yu Gothic" pitchFamily="34" charset="-122"/>
                 <a:cs typeface="Yu Gothic" pitchFamily="34" charset="-120"/>
               </a:rPr>
-              <a:t>田中様、こうしてお言葉を残してくださり、ありがとうございます。</a:t>
+              <a:t>田中様、ありがとうございます。</a:t>
             </a:r>
             <a:endParaRPr lang="en-US" sz="1050" dirty="0"/>
           </a:p>
@@ -4916,7 +4916,7 @@
                 <a:ea typeface="Yu Gothic" pitchFamily="34" charset="-122"/>
                 <a:cs typeface="Yu Gothic" pitchFamily="34" charset="-120"/>
               </a:rPr>
-              <a:t>鳥の声で目覚め、カエルの合唱で眠る——私たちがこの谷に宿をつくった理由を、そのまま言葉にしていただいたようです。スタッフにも必ず伝えます。</a:t>
+              <a:t>プールからの眺めを気に入っていただけて何よりです。スタッフにも伝えます。</a:t>
             </a:r>
             <a:endParaRPr lang="en-US" sz="1050" dirty="0"/>
           </a:p>
@@ -4936,7 +4936,36 @@
                 <a:ea typeface="Yu Gothic" pitchFamily="34" charset="-122"/>
                 <a:cs typeface="Yu Gothic" pitchFamily="34" charset="-120"/>
               </a:rPr>
-              <a:t>次にお越しの際は、霧が谷を渡る早朝の時間もぜひ。</a:t>
+              <a:t>またのお越しをお待ちしております。</a:t>
+            </a:r>
+            <a:endParaRPr lang="en-US" sz="1050" dirty="0"/>
+          </a:p>
+          <a:p>
+            <a:pPr indent="0" marL="0">
+              <a:lnSpc>
+                <a:spcPts val="1600"/>
+              </a:lnSpc>
+              <a:buNone/>
+            </a:pPr>
+            <a:endParaRPr lang="en-US" sz="1050" dirty="0"/>
+          </a:p>
+          <a:p>
+            <a:pPr indent="0" marL="0">
+              <a:lnSpc>
+                <a:spcPts val="1600"/>
+              </a:lnSpc>
+              <a:buNone/>
+            </a:pPr>
+            <a:r>
+              <a:rPr lang="en-US" sz="1050" dirty="0">
+                <a:solidFill>
+                  <a:srgbClr val="16221A"/>
+                </a:solidFill>
+                <a:latin typeface="Yu Gothic" pitchFamily="34" charset="0"/>
+                <a:ea typeface="Yu Gothic" pitchFamily="34" charset="-122"/>
+                <a:cs typeface="Yu Gothic" pitchFamily="34" charset="-120"/>
+              </a:rPr>
+              <a:t>Hoshi Jungle Team</a:t>
             </a:r>
             <a:endParaRPr lang="en-US" sz="1050" dirty="0"/>
           </a:p>
@@ -4975,7 +5004,7 @@
                 <a:ea typeface="Yu Gothic" pitchFamily="34" charset="-122"/>
                 <a:cs typeface="Yu Gothic" pitchFamily="34" charset="-120"/>
               </a:rPr>
-              <a:t>5つ星 → 感謝と、次回の楽しみを一つだけ</a:t>
+              <a:t>5つ星 → 何を喜んでくれたかに具体的に触れて感謝する</a:t>
             </a:r>
             <a:endParaRPr lang="en-US" sz="1000" dirty="0"/>
           </a:p>
@@ -4989,12 +5018,12 @@
         </p:nvSpPr>
         <p:spPr>
           <a:xfrm>
-            <a:off x="6263640" y="1874520"/>
-            <a:ext cx="5212080" cy="1572768"/>
+            <a:off x="6263640" y="1965960"/>
+            <a:ext cx="5212080" cy="1188720"/>
           </a:xfrm>
           <a:prstGeom prst="roundRect">
             <a:avLst>
-              <a:gd name="adj" fmla="val 3488"/>
+              <a:gd name="adj" fmla="val 4615"/>
             </a:avLst>
           </a:prstGeom>
           <a:solidFill>
@@ -5016,7 +5045,7 @@
         </p:nvSpPr>
         <p:spPr>
           <a:xfrm>
-            <a:off x="6519672" y="1993392"/>
+            <a:off x="6519672" y="2084832"/>
             <a:ext cx="1188720" cy="292608"/>
           </a:xfrm>
           <a:prstGeom prst="rect">
@@ -5055,7 +5084,7 @@
         </p:nvSpPr>
         <p:spPr>
           <a:xfrm>
-            <a:off x="7726680" y="2011680"/>
+            <a:off x="7726680" y="2103120"/>
             <a:ext cx="3474720" cy="274320"/>
           </a:xfrm>
           <a:prstGeom prst="rect">
@@ -5094,8 +5123,8 @@
         </p:nvSpPr>
         <p:spPr>
           <a:xfrm>
-            <a:off x="6519672" y="2331720"/>
-            <a:ext cx="4700016" cy="1005840"/>
+            <a:off x="6519672" y="2423160"/>
+            <a:ext cx="4700016" cy="640080"/>
           </a:xfrm>
           <a:prstGeom prst="rect">
             <a:avLst/>
@@ -5122,7 +5151,7 @@
                 <a:ea typeface="Yu Gothic" pitchFamily="34" charset="-122"/>
                 <a:cs typeface="Yu Gothic" pitchFamily="34" charset="-120"/>
               </a:rPr>
-              <a:t>Room wasn't clean on arrival and the AC in the bedroom didn't work for two nights. Staff were apologetic but nothing was actually fixed.</a:t>
+              <a:t>The room wasn't clean when we arrived and the AC didn't work.</a:t>
             </a:r>
             <a:endParaRPr lang="en-US" sz="1050" dirty="0"/>
           </a:p>
@@ -5136,7 +5165,7 @@
         </p:nvSpPr>
         <p:spPr>
           <a:xfrm>
-            <a:off x="8595360" y="3474720"/>
+            <a:off x="8595360" y="3246120"/>
             <a:ext cx="548640" cy="274320"/>
           </a:xfrm>
           <a:prstGeom prst="rect">
@@ -5175,12 +5204,12 @@
         </p:nvSpPr>
         <p:spPr>
           <a:xfrm>
-            <a:off x="6263640" y="3785616"/>
-            <a:ext cx="5212080" cy="1874520"/>
+            <a:off x="6263640" y="3611880"/>
+            <a:ext cx="5212080" cy="2057400"/>
           </a:xfrm>
           <a:prstGeom prst="roundRect">
             <a:avLst>
-              <a:gd name="adj" fmla="val 2927"/>
+              <a:gd name="adj" fmla="val 2667"/>
             </a:avLst>
           </a:prstGeom>
           <a:solidFill>
@@ -5202,7 +5231,7 @@
         </p:nvSpPr>
         <p:spPr>
           <a:xfrm>
-            <a:off x="6519672" y="3895344"/>
+            <a:off x="6519672" y="3749040"/>
             <a:ext cx="4700016" cy="256032"/>
           </a:xfrm>
           <a:prstGeom prst="rect">
@@ -5241,8 +5270,8 @@
         </p:nvSpPr>
         <p:spPr>
           <a:xfrm>
-            <a:off x="6519672" y="4187952"/>
-            <a:ext cx="4700016" cy="1371600"/>
+            <a:off x="6519672" y="4059936"/>
+            <a:ext cx="4700016" cy="1508760"/>
           </a:xfrm>
           <a:prstGeom prst="rect">
             <a:avLst/>
@@ -5269,7 +5298,7 @@
                 <a:ea typeface="Yu Gothic" pitchFamily="34" charset="-122"/>
                 <a:cs typeface="Yu Gothic" pitchFamily="34" charset="-120"/>
               </a:rPr>
-              <a:t>Michael, thank you for telling us — and I am sorry.</a:t>
+              <a:t>Michael, I am sorry.</a:t>
             </a:r>
             <a:endParaRPr lang="en-US" sz="1050" dirty="0"/>
           </a:p>
@@ -5289,7 +5318,7 @@
                 <a:ea typeface="Yu Gothic" pitchFamily="34" charset="-122"/>
                 <a:cs typeface="Yu Gothic" pitchFamily="34" charset="-120"/>
               </a:rPr>
-              <a:t>Arriving to a room that had not been properly cleaned, then two nights without working air conditioning, is not a stay we can be satisfied with.</a:t>
+              <a:t>The room should have been clean, and the air conditioning should have been working. We have raised both with our team.</a:t>
             </a:r>
             <a:endParaRPr lang="en-US" sz="1050" dirty="0"/>
           </a:p>
@@ -5309,7 +5338,36 @@
                 <a:ea typeface="Yu Gothic" pitchFamily="34" charset="-122"/>
                 <a:cs typeface="Yu Gothic" pitchFamily="34" charset="-120"/>
               </a:rPr>
-              <a:t>We have taken both points to our housekeeping and engineering teams.</a:t>
+              <a:t>Please contact us at stay@hoshijungle.com so we can put this right.</a:t>
+            </a:r>
+            <a:endParaRPr lang="en-US" sz="1050" dirty="0"/>
+          </a:p>
+          <a:p>
+            <a:pPr indent="0" marL="0">
+              <a:lnSpc>
+                <a:spcPts val="1600"/>
+              </a:lnSpc>
+              <a:buNone/>
+            </a:pPr>
+            <a:endParaRPr lang="en-US" sz="1050" dirty="0"/>
+          </a:p>
+          <a:p>
+            <a:pPr indent="0" marL="0">
+              <a:lnSpc>
+                <a:spcPts val="1600"/>
+              </a:lnSpc>
+              <a:buNone/>
+            </a:pPr>
+            <a:r>
+              <a:rPr lang="en-US" sz="1050" dirty="0">
+                <a:solidFill>
+                  <a:srgbClr val="16221A"/>
+                </a:solidFill>
+                <a:latin typeface="Yu Gothic" pitchFamily="34" charset="0"/>
+                <a:ea typeface="Yu Gothic" pitchFamily="34" charset="-122"/>
+                <a:cs typeface="Yu Gothic" pitchFamily="34" charset="-120"/>
+              </a:rPr>
+              <a:t>Hoshi Jungle Team</a:t>
             </a:r>
             <a:endParaRPr lang="en-US" sz="1050" dirty="0"/>
           </a:p>
@@ -5348,7 +5406,7 @@
                 <a:ea typeface="Yu Gothic" pitchFamily="34" charset="-122"/>
                 <a:cs typeface="Yu Gothic" pitchFamily="34" charset="-120"/>
               </a:rPr>
-              <a:t>1〜2つ星 → 謝罪・事実の受け止め・具体的な対応</a:t>
+              <a:t>1〜2つ星 → 言い訳せず謝罪し、対応と連絡先を示す</a:t>
             </a:r>
             <a:endParaRPr lang="en-US" sz="1000" dirty="0"/>
           </a:p>

--- a/hoshi-jungle-review-ai/docs/proposal/hoshi-jungle-proposal.pptx
+++ b/hoshi-jungle-review-ai/docs/proposal/hoshi-jungle-proposal.pptx
@@ -3479,7 +3479,7 @@
                 <a:ea typeface="Yu Gothic" pitchFamily="34" charset="-122"/>
                 <a:cs typeface="Yu Gothic" pitchFamily="34" charset="-120"/>
               </a:rPr>
-              <a:t>届いた言語で、</a:t>
+              <a:t>5か国語に、</a:t>
             </a:r>
             <a:endParaRPr lang="en-US" sz="1900" dirty="0"/>
           </a:p>
@@ -3499,7 +3499,7 @@
                 <a:ea typeface="Yu Gothic" pitchFamily="34" charset="-122"/>
                 <a:cs typeface="Yu Gothic" pitchFamily="34" charset="-120"/>
               </a:rPr>
-              <a:t>そのまま返す</a:t>
+              <a:t>届いた言語で返す</a:t>
             </a:r>
             <a:endParaRPr lang="en-US" sz="1900" dirty="0"/>
           </a:p>
@@ -3541,7 +3541,7 @@
                 <a:ea typeface="Yu Gothic" pitchFamily="34" charset="-122"/>
                 <a:cs typeface="Yu Gothic" pitchFamily="34" charset="-120"/>
               </a:rPr>
-              <a:t>日本語には日本語、英語には英語、インドネシア語にはインドネシア語で返信案を作ります。翻訳の貼り付けではありません。</a:t>
+              <a:t>日本語・英語・インドネシア語・中国語・韓国語。バリ島の来訪者数の実績にもとづいて選びました。</a:t>
             </a:r>
             <a:endParaRPr lang="en-US" sz="1150" dirty="0"/>
           </a:p>
@@ -3676,7 +3676,7 @@
                 <a:ea typeface="Yu Gothic" pitchFamily="34" charset="-122"/>
                 <a:cs typeface="Yu Gothic" pitchFamily="34" charset="-120"/>
               </a:rPr>
-              <a:t>勝手には</a:t>
+              <a:t>3つの案から</a:t>
             </a:r>
             <a:endParaRPr lang="en-US" sz="1900" dirty="0"/>
           </a:p>
@@ -3696,7 +3696,7 @@
                 <a:ea typeface="Yu Gothic" pitchFamily="34" charset="-122"/>
                 <a:cs typeface="Yu Gothic" pitchFamily="34" charset="-120"/>
               </a:rPr>
-              <a:t>公開しない</a:t>
+              <a:t>選ぶだけ</a:t>
             </a:r>
             <a:endParaRPr lang="en-US" sz="1900" dirty="0"/>
           </a:p>
@@ -3738,7 +3738,7 @@
                 <a:ea typeface="Yu Gothic" pitchFamily="34" charset="-122"/>
                 <a:cs typeface="Yu Gothic" pitchFamily="34" charset="-120"/>
               </a:rPr>
-              <a:t>AIが書くのは下書きまで。スタッフが読んで、直して、ボタンを押して初めてGoogleに反映されます。</a:t>
+              <a:t>丁寧・標準・簡潔の3案を用意します。書き直すのではなく選ぶだけ。公開はボタンを押したときだけです。</a:t>
             </a:r>
             <a:endParaRPr lang="en-US" sz="1150" dirty="0"/>
           </a:p>
@@ -3873,7 +3873,7 @@
                 <a:ea typeface="Yu Gothic" pitchFamily="34" charset="-122"/>
                 <a:cs typeface="Yu Gothic" pitchFamily="34" charset="-120"/>
               </a:rPr>
-              <a:t>運用費は</a:t>
+              <a:t>管理費は</a:t>
             </a:r>
             <a:endParaRPr lang="en-US" sz="1900" dirty="0"/>
           </a:p>
@@ -3893,7 +3893,7 @@
                 <a:ea typeface="Yu Gothic" pitchFamily="34" charset="-122"/>
                 <a:cs typeface="Yu Gothic" pitchFamily="34" charset="-120"/>
               </a:rPr>
-              <a:t>月額0円</a:t>
+              <a:t>いただきません</a:t>
             </a:r>
             <a:endParaRPr lang="en-US" sz="1900" dirty="0"/>
           </a:p>
@@ -3935,7 +3935,7 @@
                 <a:ea typeface="Yu Gothic" pitchFamily="34" charset="-122"/>
                 <a:cs typeface="Yu Gothic" pitchFamily="34" charset="-120"/>
               </a:rPr>
-              <a:t>サーバー・データベース・Google連携はすべて無料枠で運用します。追加のご負担はありません。</a:t>
+              <a:t>月額の管理費・保守費はありません。サーバー代もかかりません。ホテル様のご負担は0円です。</a:t>
             </a:r>
             <a:endParaRPr lang="en-US" sz="1150" dirty="0"/>
           </a:p>
@@ -4412,8 +4412,8 @@
         </p:blipFill>
         <p:spPr>
           <a:xfrm>
-            <a:off x="5829027" y="566928"/>
-            <a:ext cx="5646693" cy="5669280"/>
+            <a:off x="6245757" y="566928"/>
+            <a:ext cx="5229963" cy="5669280"/>
           </a:xfrm>
           <a:prstGeom prst="rect">
             <a:avLst/>
@@ -7257,7 +7257,7 @@
                 <a:ea typeface="Yu Gothic" pitchFamily="34" charset="-122"/>
                 <a:cs typeface="Yu Gothic" pitchFamily="34" charset="-120"/>
               </a:rPr>
-              <a:t>運用費は月額0円です</a:t>
+              <a:t>管理費はいただきません</a:t>
             </a:r>
             <a:endParaRPr lang="en-US" sz="3200" dirty="0"/>
           </a:p>
@@ -7296,7 +7296,7 @@
                 <a:ea typeface="Yu Gothic" pitchFamily="34" charset="-122"/>
                 <a:cs typeface="Yu Gothic" pitchFamily="34" charset="-120"/>
               </a:rPr>
-              <a:t>すべて無料枠に収まるよう設計しました。従量課金で青天井になる部分はありません</a:t>
+              <a:t>月額の管理費・保守費はありません。サーバー代もすべて無料枠に収まるよう設計しました</a:t>
             </a:r>
             <a:endParaRPr lang="en-US" sz="1300" dirty="0"/>
           </a:p>
@@ -7415,7 +7415,7 @@
                 <a:ea typeface="Yu Gothic" pitchFamily="34" charset="-122"/>
                 <a:cs typeface="Yu Gothic" pitchFamily="34" charset="-120"/>
               </a:rPr>
-              <a:t>ホテル様のご負担はありません</a:t>
+              <a:t>毎月かかる費用はありません</a:t>
             </a:r>
             <a:endParaRPr lang="en-US" sz="1150" dirty="0"/>
           </a:p>
@@ -8496,7 +8496,7 @@
                           <a:ea typeface="Yu Gothic" pitchFamily="34" charset="-122"/>
                           <a:cs typeface="Yu Gothic" pitchFamily="34" charset="-120"/>
                         </a:rPr>
-                        <a:t>AI（返信案の作成）</a:t>
+                        <a:t>管理費・保守費</a:t>
                       </a:r>
                       <a:endParaRPr lang="en-US" sz="1150" dirty="0">
                         <a:latin typeface="Yu Gothic" charset="0"/>
@@ -8564,7 +8564,213 @@
                           <a:ea typeface="Yu Gothic" pitchFamily="34" charset="-122"/>
                           <a:cs typeface="Yu Gothic" pitchFamily="34" charset="-120"/>
                         </a:rPr>
-                        <a:t>月71件まで</a:t>
+                        <a:t>毎月の運用サポート</a:t>
+                      </a:r>
+                      <a:endParaRPr lang="en-US" sz="1150" dirty="0">
+                        <a:latin typeface="Yu Gothic" charset="0"/>
+                        <a:ea typeface="Yu Gothic" charset="0"/>
+                        <a:cs typeface="Yu Gothic" charset="0"/>
+                      </a:endParaRPr>
+                    </a:p>
+                  </a:txBody>
+                  <a:tcPr marL="73152" marR="73152" marT="73152" marB="73152" anchor="ctr">
+                    <a:lnL w="12700" cap="flat" cmpd="sng" algn="ctr">
+                      <a:solidFill>
+                        <a:srgbClr val="D8E0D5"/>
+                      </a:solidFill>
+                      <a:prstDash val="solid"/>
+                      <a:round/>
+                      <a:headEnd type="none" w="med" len="med"/>
+                      <a:tailEnd type="none" w="med" len="med"/>
+                    </a:lnL>
+                    <a:lnR w="12700" cap="flat" cmpd="sng" algn="ctr">
+                      <a:solidFill>
+                        <a:srgbClr val="D8E0D5"/>
+                      </a:solidFill>
+                      <a:prstDash val="solid"/>
+                      <a:round/>
+                      <a:headEnd type="none" w="med" len="med"/>
+                      <a:tailEnd type="none" w="med" len="med"/>
+                    </a:lnR>
+                    <a:lnT w="12700" cap="flat" cmpd="sng" algn="ctr">
+                      <a:solidFill>
+                        <a:srgbClr val="D8E0D5"/>
+                      </a:solidFill>
+                      <a:prstDash val="solid"/>
+                      <a:round/>
+                      <a:headEnd type="none" w="med" len="med"/>
+                      <a:tailEnd type="none" w="med" len="med"/>
+                    </a:lnT>
+                    <a:lnB w="12700" cap="flat" cmpd="sng" algn="ctr">
+                      <a:solidFill>
+                        <a:srgbClr val="D8E0D5"/>
+                      </a:solidFill>
+                      <a:prstDash val="solid"/>
+                      <a:round/>
+                      <a:headEnd type="none" w="med" len="med"/>
+                      <a:tailEnd type="none" w="med" len="med"/>
+                    </a:lnB>
+                    <a:solidFill>
+                      <a:srgbClr val="FFFFFF"/>
+                    </a:solidFill>
+                  </a:tcPr>
+                </a:tc>
+                <a:tc>
+                  <a:txBody>
+                    <a:bodyPr/>
+                    <a:lstStyle/>
+                    <a:p>
+                      <a:pPr algn="r" indent="0" marL="0">
+                        <a:buNone/>
+                      </a:pPr>
+                      <a:r>
+                        <a:rPr lang="en-US" sz="1150" b="1" dirty="0">
+                          <a:solidFill>
+                            <a:srgbClr val="1F5C47"/>
+                          </a:solidFill>
+                          <a:latin typeface="Yu Gothic" pitchFamily="34" charset="0"/>
+                          <a:ea typeface="Yu Gothic" pitchFamily="34" charset="-122"/>
+                          <a:cs typeface="Yu Gothic" pitchFamily="34" charset="-120"/>
+                        </a:rPr>
+                        <a:t>0円</a:t>
+                      </a:r>
+                      <a:endParaRPr lang="en-US" sz="1150" dirty="0">
+                        <a:latin typeface="Yu Gothic" charset="0"/>
+                        <a:ea typeface="Yu Gothic" charset="0"/>
+                        <a:cs typeface="Yu Gothic" charset="0"/>
+                      </a:endParaRPr>
+                    </a:p>
+                  </a:txBody>
+                  <a:tcPr marL="73152" marR="73152" marT="73152" marB="73152" anchor="ctr">
+                    <a:lnL w="12700" cap="flat" cmpd="sng" algn="ctr">
+                      <a:solidFill>
+                        <a:srgbClr val="D8E0D5"/>
+                      </a:solidFill>
+                      <a:prstDash val="solid"/>
+                      <a:round/>
+                      <a:headEnd type="none" w="med" len="med"/>
+                      <a:tailEnd type="none" w="med" len="med"/>
+                    </a:lnL>
+                    <a:lnR w="12700" cap="flat" cmpd="sng" algn="ctr">
+                      <a:solidFill>
+                        <a:srgbClr val="D8E0D5"/>
+                      </a:solidFill>
+                      <a:prstDash val="solid"/>
+                      <a:round/>
+                      <a:headEnd type="none" w="med" len="med"/>
+                      <a:tailEnd type="none" w="med" len="med"/>
+                    </a:lnR>
+                    <a:lnT w="12700" cap="flat" cmpd="sng" algn="ctr">
+                      <a:solidFill>
+                        <a:srgbClr val="D8E0D5"/>
+                      </a:solidFill>
+                      <a:prstDash val="solid"/>
+                      <a:round/>
+                      <a:headEnd type="none" w="med" len="med"/>
+                      <a:tailEnd type="none" w="med" len="med"/>
+                    </a:lnT>
+                    <a:lnB w="12700" cap="flat" cmpd="sng" algn="ctr">
+                      <a:solidFill>
+                        <a:srgbClr val="D8E0D5"/>
+                      </a:solidFill>
+                      <a:prstDash val="solid"/>
+                      <a:round/>
+                      <a:headEnd type="none" w="med" len="med"/>
+                      <a:tailEnd type="none" w="med" len="med"/>
+                    </a:lnB>
+                    <a:solidFill>
+                      <a:srgbClr val="FFFFFF"/>
+                    </a:solidFill>
+                  </a:tcPr>
+                </a:tc>
+              </a:tr>
+              <a:tr h="402336">
+                <a:tc>
+                  <a:txBody>
+                    <a:bodyPr/>
+                    <a:lstStyle/>
+                    <a:p>
+                      <a:pPr indent="0" marL="0">
+                        <a:buNone/>
+                      </a:pPr>
+                      <a:r>
+                        <a:rPr lang="en-US" sz="1150" dirty="0">
+                          <a:solidFill>
+                            <a:srgbClr val="16221A"/>
+                          </a:solidFill>
+                          <a:latin typeface="Yu Gothic" pitchFamily="34" charset="0"/>
+                          <a:ea typeface="Yu Gothic" pitchFamily="34" charset="-122"/>
+                          <a:cs typeface="Yu Gothic" pitchFamily="34" charset="-120"/>
+                        </a:rPr>
+                        <a:t>AI（3案の作成）</a:t>
+                      </a:r>
+                      <a:endParaRPr lang="en-US" sz="1150" dirty="0">
+                        <a:latin typeface="Yu Gothic" charset="0"/>
+                        <a:ea typeface="Yu Gothic" charset="0"/>
+                        <a:cs typeface="Yu Gothic" charset="0"/>
+                      </a:endParaRPr>
+                    </a:p>
+                  </a:txBody>
+                  <a:tcPr marL="73152" marR="73152" marT="73152" marB="73152" anchor="ctr">
+                    <a:lnL w="12700" cap="flat" cmpd="sng" algn="ctr">
+                      <a:solidFill>
+                        <a:srgbClr val="D8E0D5"/>
+                      </a:solidFill>
+                      <a:prstDash val="solid"/>
+                      <a:round/>
+                      <a:headEnd type="none" w="med" len="med"/>
+                      <a:tailEnd type="none" w="med" len="med"/>
+                    </a:lnL>
+                    <a:lnR w="12700" cap="flat" cmpd="sng" algn="ctr">
+                      <a:solidFill>
+                        <a:srgbClr val="D8E0D5"/>
+                      </a:solidFill>
+                      <a:prstDash val="solid"/>
+                      <a:round/>
+                      <a:headEnd type="none" w="med" len="med"/>
+                      <a:tailEnd type="none" w="med" len="med"/>
+                    </a:lnR>
+                    <a:lnT w="12700" cap="flat" cmpd="sng" algn="ctr">
+                      <a:solidFill>
+                        <a:srgbClr val="D8E0D5"/>
+                      </a:solidFill>
+                      <a:prstDash val="solid"/>
+                      <a:round/>
+                      <a:headEnd type="none" w="med" len="med"/>
+                      <a:tailEnd type="none" w="med" len="med"/>
+                    </a:lnT>
+                    <a:lnB w="12700" cap="flat" cmpd="sng" algn="ctr">
+                      <a:solidFill>
+                        <a:srgbClr val="D8E0D5"/>
+                      </a:solidFill>
+                      <a:prstDash val="solid"/>
+                      <a:round/>
+                      <a:headEnd type="none" w="med" len="med"/>
+                      <a:tailEnd type="none" w="med" len="med"/>
+                    </a:lnB>
+                    <a:solidFill>
+                      <a:srgbClr val="FFFFFF"/>
+                    </a:solidFill>
+                  </a:tcPr>
+                </a:tc>
+                <a:tc>
+                  <a:txBody>
+                    <a:bodyPr/>
+                    <a:lstStyle/>
+                    <a:p>
+                      <a:pPr indent="0" marL="0">
+                        <a:buNone/>
+                      </a:pPr>
+                      <a:r>
+                        <a:rPr lang="en-US" sz="1150" dirty="0">
+                          <a:solidFill>
+                            <a:srgbClr val="44584B"/>
+                          </a:solidFill>
+                          <a:latin typeface="Yu Gothic" pitchFamily="34" charset="0"/>
+                          <a:ea typeface="Yu Gothic" pitchFamily="34" charset="-122"/>
+                          <a:cs typeface="Yu Gothic" pitchFamily="34" charset="-120"/>
+                        </a:rPr>
+                        <a:t>月43件まで</a:t>
                       </a:r>
                       <a:endParaRPr lang="en-US" sz="1150" dirty="0">
                         <a:latin typeface="Yu Gothic" charset="0"/>

--- a/hoshi-jungle-review-ai/docs/proposal/hoshi-jungle-proposal.pptx
+++ b/hoshi-jungle-review-ai/docs/proposal/hoshi-jungle-proposal.pptx
@@ -1215,7 +1215,7 @@
           <a:p>
             <a:r>
               <a:rPr lang="en-US" dirty="0"/>
-              <a:t>返信量を増やしたい場合は月数百円程度で拡張できます。</a:t>
+              <a:t>管理費は0円のまま。返信数だけ、AIの実費で増やせるという説明の仕方が伝わりやすい。</a:t>
             </a:r>
             <a:endParaRPr lang="en-US" dirty="0"/>
           </a:p>
@@ -7296,7 +7296,7 @@
                 <a:ea typeface="Yu Gothic" pitchFamily="34" charset="-122"/>
                 <a:cs typeface="Yu Gothic" pitchFamily="34" charset="-120"/>
               </a:rPr>
-              <a:t>月額の管理費・保守費はありません。サーバー代もすべて無料枠に収まるよう設計しました</a:t>
+              <a:t>月額の管理費・保守費はありません。返信数を増やしたいときだけ、AIの実費で上限を上げられます</a:t>
             </a:r>
             <a:endParaRPr lang="en-US" sz="1300" dirty="0"/>
           </a:p>
@@ -7311,11 +7311,11 @@
         <p:spPr>
           <a:xfrm>
             <a:off x="685800" y="1920240"/>
-            <a:ext cx="3931920" cy="2834640"/>
+            <a:ext cx="3931920" cy="2606040"/>
           </a:xfrm>
           <a:prstGeom prst="roundRect">
             <a:avLst>
-              <a:gd name="adj" fmla="val 1935"/>
+              <a:gd name="adj" fmla="val 2105"/>
             </a:avLst>
           </a:prstGeom>
           <a:solidFill>
@@ -7337,8 +7337,8 @@
         </p:nvSpPr>
         <p:spPr>
           <a:xfrm>
-            <a:off x="685800" y="2560320"/>
-            <a:ext cx="3931920" cy="1645920"/>
+            <a:off x="685800" y="2432304"/>
+            <a:ext cx="3931920" cy="1554480"/>
           </a:xfrm>
           <a:prstGeom prst="rect">
             <a:avLst/>
@@ -7390,7 +7390,7 @@
         </p:nvSpPr>
         <p:spPr>
           <a:xfrm>
-            <a:off x="685800" y="4224528"/>
+            <a:off x="685800" y="4041648"/>
             <a:ext cx="3931920" cy="365760"/>
           </a:xfrm>
           <a:prstGeom prst="rect">
@@ -7448,7 +7448,7 @@
                 <a:gridCol w="3017520"/>
                 <a:gridCol w="1188720"/>
               </a:tblGrid>
-              <a:tr h="402336">
+              <a:tr h="347472">
                 <a:tc>
                   <a:txBody>
                     <a:bodyPr/>
@@ -7654,7 +7654,7 @@
                   </a:tcPr>
                 </a:tc>
               </a:tr>
-              <a:tr h="402336">
+              <a:tr h="347472">
                 <a:tc>
                   <a:txBody>
                     <a:bodyPr/>
@@ -7860,7 +7860,7 @@
                   </a:tcPr>
                 </a:tc>
               </a:tr>
-              <a:tr h="402336">
+              <a:tr h="347472">
                 <a:tc>
                   <a:txBody>
                     <a:bodyPr/>
@@ -8066,7 +8066,7 @@
                   </a:tcPr>
                 </a:tc>
               </a:tr>
-              <a:tr h="402336">
+              <a:tr h="347472">
                 <a:tc>
                   <a:txBody>
                     <a:bodyPr/>
@@ -8272,7 +8272,7 @@
                   </a:tcPr>
                 </a:tc>
               </a:tr>
-              <a:tr h="402336">
+              <a:tr h="347472">
                 <a:tc>
                   <a:txBody>
                     <a:bodyPr/>
@@ -8478,7 +8478,7 @@
                   </a:tcPr>
                 </a:tc>
               </a:tr>
-              <a:tr h="402336">
+              <a:tr h="347472">
                 <a:tc>
                   <a:txBody>
                     <a:bodyPr/>
@@ -8684,7 +8684,7 @@
                   </a:tcPr>
                 </a:tc>
               </a:tr>
-              <a:tr h="402336">
+              <a:tr h="347472">
                 <a:tc>
                   <a:txBody>
                     <a:bodyPr/>
@@ -8902,8 +8902,8 @@
         </p:nvSpPr>
         <p:spPr>
           <a:xfrm>
-            <a:off x="4983480" y="4892040"/>
-            <a:ext cx="6492240" cy="731520"/>
+            <a:off x="4983480" y="4773168"/>
+            <a:ext cx="6492240" cy="457200"/>
           </a:xfrm>
           <a:prstGeom prst="rect">
             <a:avLst/>
@@ -8917,12 +8917,12 @@
           <a:p>
             <a:pPr indent="0" marL="0">
               <a:lnSpc>
-                <a:spcPts val="1700"/>
+                <a:spcPts val="1500"/>
               </a:lnSpc>
               <a:buNone/>
             </a:pPr>
             <a:r>
-              <a:rPr lang="en-US" sz="1050" dirty="0">
+              <a:rPr lang="en-US" sz="1000" dirty="0">
                 <a:solidFill>
                   <a:srgbClr val="72877A"/>
                 </a:solidFill>
@@ -8932,13 +8932,670 @@
               </a:rPr>
               <a:t>AIの利用分は無料枠の範囲で自動的に停止します。上限に達してもクチコミの取得は続き、手動での返信は可能です。上限は毎月1日にリセットされます。</a:t>
             </a:r>
-            <a:endParaRPr lang="en-US" sz="1050" dirty="0"/>
+            <a:endParaRPr lang="en-US" sz="1000" dirty="0"/>
           </a:p>
         </p:txBody>
       </p:sp>
       <p:sp>
         <p:nvSpPr>
           <p:cNvPr id="9" name="Text 6"/>
+          <p:cNvSpPr txBox="1"/>
+          <p:nvPr/>
+        </p:nvSpPr>
+        <p:spPr>
+          <a:xfrm>
+            <a:off x="685800" y="5193792"/>
+            <a:ext cx="3017520" cy="274320"/>
+          </a:xfrm>
+          <a:prstGeom prst="rect">
+            <a:avLst/>
+          </a:prstGeom>
+          <a:noFill/>
+          <a:ln/>
+        </p:spPr>
+        <p:txBody>
+          <a:bodyPr wrap="square" lIns="0" tIns="0" rIns="0" bIns="0" rtlCol="0" anchor="ctr"/>
+          <a:lstStyle/>
+          <a:p>
+            <a:pPr indent="0" marL="0">
+              <a:buNone/>
+            </a:pPr>
+            <a:r>
+              <a:rPr lang="en-US" sz="1300" b="1" dirty="0">
+                <a:solidFill>
+                  <a:srgbClr val="16221A"/>
+                </a:solidFill>
+                <a:latin typeface="Yu Gothic" pitchFamily="34" charset="0"/>
+                <a:ea typeface="Yu Gothic" pitchFamily="34" charset="-122"/>
+                <a:cs typeface="Yu Gothic" pitchFamily="34" charset="-120"/>
+              </a:rPr>
+              <a:t>返信が月43件で足りないときは</a:t>
+            </a:r>
+            <a:endParaRPr lang="en-US" sz="1300" dirty="0"/>
+          </a:p>
+        </p:txBody>
+      </p:sp>
+      <p:sp>
+        <p:nvSpPr>
+          <p:cNvPr id="10" name="Text 7"/>
+          <p:cNvSpPr txBox="1"/>
+          <p:nvPr/>
+        </p:nvSpPr>
+        <p:spPr>
+          <a:xfrm>
+            <a:off x="685800" y="5468112"/>
+            <a:ext cx="3017520" cy="594360"/>
+          </a:xfrm>
+          <a:prstGeom prst="rect">
+            <a:avLst/>
+          </a:prstGeom>
+          <a:noFill/>
+          <a:ln/>
+        </p:spPr>
+        <p:txBody>
+          <a:bodyPr wrap="square" lIns="0" tIns="0" rIns="0" bIns="0" rtlCol="0" anchor="ctr"/>
+          <a:lstStyle/>
+          <a:p>
+            <a:pPr indent="0" marL="0">
+              <a:lnSpc>
+                <a:spcPts val="1400"/>
+              </a:lnSpc>
+              <a:buNone/>
+            </a:pPr>
+            <a:r>
+              <a:rPr lang="en-US" sz="950" dirty="0">
+                <a:solidFill>
+                  <a:srgbClr val="44584B"/>
+                </a:solidFill>
+                <a:latin typeface="Yu Gothic" pitchFamily="34" charset="0"/>
+                <a:ea typeface="Yu Gothic" pitchFamily="34" charset="-122"/>
+                <a:cs typeface="Yu Gothic" pitchFamily="34" charset="-120"/>
+              </a:rPr>
+              <a:t>AIの利用料だけを実費でお支払いいただければ、上限を上げられます。管理費は変わらず0円です。</a:t>
+            </a:r>
+            <a:endParaRPr lang="en-US" sz="950" dirty="0"/>
+          </a:p>
+        </p:txBody>
+      </p:sp>
+      <p:sp>
+        <p:nvSpPr>
+          <p:cNvPr id="11" name="Shape 8"/>
+          <p:cNvSpPr/>
+          <p:nvPr/>
+        </p:nvSpPr>
+        <p:spPr>
+          <a:xfrm>
+            <a:off x="4389120" y="5157216"/>
+            <a:ext cx="1783080" cy="914400"/>
+          </a:xfrm>
+          <a:prstGeom prst="roundRect">
+            <a:avLst>
+              <a:gd name="adj" fmla="val 6000"/>
+            </a:avLst>
+          </a:prstGeom>
+          <a:solidFill>
+            <a:srgbClr val="DDEAE2"/>
+          </a:solidFill>
+          <a:ln w="12700">
+            <a:solidFill>
+              <a:srgbClr val="A9C9B8"/>
+            </a:solidFill>
+            <a:prstDash val="solid"/>
+          </a:ln>
+        </p:spPr>
+      </p:sp>
+      <p:sp>
+        <p:nvSpPr>
+          <p:cNvPr id="12" name="Text 9"/>
+          <p:cNvSpPr txBox="1"/>
+          <p:nvPr/>
+        </p:nvSpPr>
+        <p:spPr>
+          <a:xfrm>
+            <a:off x="4389120" y="5248656"/>
+            <a:ext cx="1783080" cy="219456"/>
+          </a:xfrm>
+          <a:prstGeom prst="rect">
+            <a:avLst/>
+          </a:prstGeom>
+          <a:noFill/>
+          <a:ln/>
+        </p:spPr>
+        <p:txBody>
+          <a:bodyPr wrap="square" lIns="0" tIns="0" rIns="0" bIns="0" rtlCol="0" anchor="ctr"/>
+          <a:lstStyle/>
+          <a:p>
+            <a:pPr algn="ctr" indent="0" marL="0">
+              <a:buNone/>
+            </a:pPr>
+            <a:r>
+              <a:rPr lang="en-US" sz="950" b="1" dirty="0">
+                <a:solidFill>
+                  <a:srgbClr val="1F5C47"/>
+                </a:solidFill>
+                <a:latin typeface="Yu Gothic" pitchFamily="34" charset="0"/>
+                <a:ea typeface="Yu Gothic" pitchFamily="34" charset="-122"/>
+                <a:cs typeface="Yu Gothic" pitchFamily="34" charset="-120"/>
+              </a:rPr>
+              <a:t>0円 / 月</a:t>
+            </a:r>
+            <a:endParaRPr lang="en-US" sz="950" dirty="0"/>
+          </a:p>
+        </p:txBody>
+      </p:sp>
+      <p:sp>
+        <p:nvSpPr>
+          <p:cNvPr id="13" name="Text 10"/>
+          <p:cNvSpPr txBox="1"/>
+          <p:nvPr/>
+        </p:nvSpPr>
+        <p:spPr>
+          <a:xfrm>
+            <a:off x="4389120" y="5449824"/>
+            <a:ext cx="1783080" cy="365760"/>
+          </a:xfrm>
+          <a:prstGeom prst="rect">
+            <a:avLst/>
+          </a:prstGeom>
+          <a:noFill/>
+          <a:ln/>
+        </p:spPr>
+        <p:txBody>
+          <a:bodyPr wrap="square" lIns="0" tIns="0" rIns="0" bIns="0" rtlCol="0" anchor="ctr"/>
+          <a:lstStyle/>
+          <a:p>
+            <a:pPr algn="ctr" indent="0" marL="0">
+              <a:buNone/>
+            </a:pPr>
+            <a:r>
+              <a:rPr lang="en-US" sz="2000" b="1" dirty="0">
+                <a:solidFill>
+                  <a:srgbClr val="16221A"/>
+                </a:solidFill>
+                <a:latin typeface="Yu Gothic" pitchFamily="34" charset="0"/>
+                <a:ea typeface="Yu Gothic" pitchFamily="34" charset="-122"/>
+                <a:cs typeface="Yu Gothic" pitchFamily="34" charset="-120"/>
+              </a:rPr>
+              <a:t>43件</a:t>
+            </a:r>
+            <a:endParaRPr lang="en-US" sz="2000" dirty="0"/>
+          </a:p>
+        </p:txBody>
+      </p:sp>
+      <p:sp>
+        <p:nvSpPr>
+          <p:cNvPr id="14" name="Text 11"/>
+          <p:cNvSpPr txBox="1"/>
+          <p:nvPr/>
+        </p:nvSpPr>
+        <p:spPr>
+          <a:xfrm>
+            <a:off x="4389120" y="5797296"/>
+            <a:ext cx="1783080" cy="219456"/>
+          </a:xfrm>
+          <a:prstGeom prst="rect">
+            <a:avLst/>
+          </a:prstGeom>
+          <a:noFill/>
+          <a:ln/>
+        </p:spPr>
+        <p:txBody>
+          <a:bodyPr wrap="square" lIns="0" tIns="0" rIns="0" bIns="0" rtlCol="0" anchor="ctr"/>
+          <a:lstStyle/>
+          <a:p>
+            <a:pPr algn="ctr" indent="0" marL="0">
+              <a:buNone/>
+            </a:pPr>
+            <a:r>
+              <a:rPr lang="en-US" sz="850" dirty="0">
+                <a:solidFill>
+                  <a:srgbClr val="72877A"/>
+                </a:solidFill>
+                <a:latin typeface="Yu Gothic" pitchFamily="34" charset="0"/>
+                <a:ea typeface="Yu Gothic" pitchFamily="34" charset="-122"/>
+                <a:cs typeface="Yu Gothic" pitchFamily="34" charset="-120"/>
+              </a:rPr>
+              <a:t>無料枠のまま</a:t>
+            </a:r>
+            <a:endParaRPr lang="en-US" sz="850" dirty="0"/>
+          </a:p>
+        </p:txBody>
+      </p:sp>
+      <p:sp>
+        <p:nvSpPr>
+          <p:cNvPr id="15" name="Shape 12"/>
+          <p:cNvSpPr/>
+          <p:nvPr/>
+        </p:nvSpPr>
+        <p:spPr>
+          <a:xfrm>
+            <a:off x="6309360" y="5157216"/>
+            <a:ext cx="1783080" cy="914400"/>
+          </a:xfrm>
+          <a:prstGeom prst="roundRect">
+            <a:avLst>
+              <a:gd name="adj" fmla="val 6000"/>
+            </a:avLst>
+          </a:prstGeom>
+          <a:solidFill>
+            <a:srgbClr val="FFFFFF"/>
+          </a:solidFill>
+          <a:ln w="12700">
+            <a:solidFill>
+              <a:srgbClr val="D8E0D5"/>
+            </a:solidFill>
+            <a:prstDash val="solid"/>
+          </a:ln>
+        </p:spPr>
+      </p:sp>
+      <p:sp>
+        <p:nvSpPr>
+          <p:cNvPr id="16" name="Text 13"/>
+          <p:cNvSpPr txBox="1"/>
+          <p:nvPr/>
+        </p:nvSpPr>
+        <p:spPr>
+          <a:xfrm>
+            <a:off x="6309360" y="5248656"/>
+            <a:ext cx="1783080" cy="219456"/>
+          </a:xfrm>
+          <a:prstGeom prst="rect">
+            <a:avLst/>
+          </a:prstGeom>
+          <a:noFill/>
+          <a:ln/>
+        </p:spPr>
+        <p:txBody>
+          <a:bodyPr wrap="square" lIns="0" tIns="0" rIns="0" bIns="0" rtlCol="0" anchor="ctr"/>
+          <a:lstStyle/>
+          <a:p>
+            <a:pPr algn="ctr" indent="0" marL="0">
+              <a:buNone/>
+            </a:pPr>
+            <a:r>
+              <a:rPr lang="en-US" sz="950" b="1" dirty="0">
+                <a:solidFill>
+                  <a:srgbClr val="72877A"/>
+                </a:solidFill>
+                <a:latin typeface="Yu Gothic" pitchFamily="34" charset="0"/>
+                <a:ea typeface="Yu Gothic" pitchFamily="34" charset="-122"/>
+                <a:cs typeface="Yu Gothic" pitchFamily="34" charset="-120"/>
+              </a:rPr>
+              <a:t>約150円 / 月</a:t>
+            </a:r>
+            <a:endParaRPr lang="en-US" sz="950" dirty="0"/>
+          </a:p>
+        </p:txBody>
+      </p:sp>
+      <p:sp>
+        <p:nvSpPr>
+          <p:cNvPr id="17" name="Text 14"/>
+          <p:cNvSpPr txBox="1"/>
+          <p:nvPr/>
+        </p:nvSpPr>
+        <p:spPr>
+          <a:xfrm>
+            <a:off x="6309360" y="5449824"/>
+            <a:ext cx="1783080" cy="365760"/>
+          </a:xfrm>
+          <a:prstGeom prst="rect">
+            <a:avLst/>
+          </a:prstGeom>
+          <a:noFill/>
+          <a:ln/>
+        </p:spPr>
+        <p:txBody>
+          <a:bodyPr wrap="square" lIns="0" tIns="0" rIns="0" bIns="0" rtlCol="0" anchor="ctr"/>
+          <a:lstStyle/>
+          <a:p>
+            <a:pPr algn="ctr" indent="0" marL="0">
+              <a:buNone/>
+            </a:pPr>
+            <a:r>
+              <a:rPr lang="en-US" sz="2000" b="1" dirty="0">
+                <a:solidFill>
+                  <a:srgbClr val="16221A"/>
+                </a:solidFill>
+                <a:latin typeface="Yu Gothic" pitchFamily="34" charset="0"/>
+                <a:ea typeface="Yu Gothic" pitchFamily="34" charset="-122"/>
+                <a:cs typeface="Yu Gothic" pitchFamily="34" charset="-120"/>
+              </a:rPr>
+              <a:t>109件</a:t>
+            </a:r>
+            <a:endParaRPr lang="en-US" sz="2000" dirty="0"/>
+          </a:p>
+        </p:txBody>
+      </p:sp>
+      <p:sp>
+        <p:nvSpPr>
+          <p:cNvPr id="18" name="Text 15"/>
+          <p:cNvSpPr txBox="1"/>
+          <p:nvPr/>
+        </p:nvSpPr>
+        <p:spPr>
+          <a:xfrm>
+            <a:off x="6309360" y="5797296"/>
+            <a:ext cx="1783080" cy="219456"/>
+          </a:xfrm>
+          <a:prstGeom prst="rect">
+            <a:avLst/>
+          </a:prstGeom>
+          <a:noFill/>
+          <a:ln/>
+        </p:spPr>
+        <p:txBody>
+          <a:bodyPr wrap="square" lIns="0" tIns="0" rIns="0" bIns="0" rtlCol="0" anchor="ctr"/>
+          <a:lstStyle/>
+          <a:p>
+            <a:pPr algn="ctr" indent="0" marL="0">
+              <a:buNone/>
+            </a:pPr>
+            <a:r>
+              <a:rPr lang="en-US" sz="850" dirty="0">
+                <a:solidFill>
+                  <a:srgbClr val="72877A"/>
+                </a:solidFill>
+                <a:latin typeface="Yu Gothic" pitchFamily="34" charset="0"/>
+                <a:ea typeface="Yu Gothic" pitchFamily="34" charset="-122"/>
+                <a:cs typeface="Yu Gothic" pitchFamily="34" charset="-120"/>
+              </a:rPr>
+              <a:t>2.5倍</a:t>
+            </a:r>
+            <a:endParaRPr lang="en-US" sz="850" dirty="0"/>
+          </a:p>
+        </p:txBody>
+      </p:sp>
+      <p:sp>
+        <p:nvSpPr>
+          <p:cNvPr id="19" name="Shape 16"/>
+          <p:cNvSpPr/>
+          <p:nvPr/>
+        </p:nvSpPr>
+        <p:spPr>
+          <a:xfrm>
+            <a:off x="8229600" y="5157216"/>
+            <a:ext cx="1783080" cy="914400"/>
+          </a:xfrm>
+          <a:prstGeom prst="roundRect">
+            <a:avLst>
+              <a:gd name="adj" fmla="val 6000"/>
+            </a:avLst>
+          </a:prstGeom>
+          <a:solidFill>
+            <a:srgbClr val="FFFFFF"/>
+          </a:solidFill>
+          <a:ln w="12700">
+            <a:solidFill>
+              <a:srgbClr val="D8E0D5"/>
+            </a:solidFill>
+            <a:prstDash val="solid"/>
+          </a:ln>
+        </p:spPr>
+      </p:sp>
+      <p:sp>
+        <p:nvSpPr>
+          <p:cNvPr id="20" name="Text 17"/>
+          <p:cNvSpPr txBox="1"/>
+          <p:nvPr/>
+        </p:nvSpPr>
+        <p:spPr>
+          <a:xfrm>
+            <a:off x="8229600" y="5248656"/>
+            <a:ext cx="1783080" cy="219456"/>
+          </a:xfrm>
+          <a:prstGeom prst="rect">
+            <a:avLst/>
+          </a:prstGeom>
+          <a:noFill/>
+          <a:ln/>
+        </p:spPr>
+        <p:txBody>
+          <a:bodyPr wrap="square" lIns="0" tIns="0" rIns="0" bIns="0" rtlCol="0" anchor="ctr"/>
+          <a:lstStyle/>
+          <a:p>
+            <a:pPr algn="ctr" indent="0" marL="0">
+              <a:buNone/>
+            </a:pPr>
+            <a:r>
+              <a:rPr lang="en-US" sz="950" b="1" dirty="0">
+                <a:solidFill>
+                  <a:srgbClr val="72877A"/>
+                </a:solidFill>
+                <a:latin typeface="Yu Gothic" pitchFamily="34" charset="0"/>
+                <a:ea typeface="Yu Gothic" pitchFamily="34" charset="-122"/>
+                <a:cs typeface="Yu Gothic" pitchFamily="34" charset="-120"/>
+              </a:rPr>
+              <a:t>約300円 / 月</a:t>
+            </a:r>
+            <a:endParaRPr lang="en-US" sz="950" dirty="0"/>
+          </a:p>
+        </p:txBody>
+      </p:sp>
+      <p:sp>
+        <p:nvSpPr>
+          <p:cNvPr id="21" name="Text 18"/>
+          <p:cNvSpPr txBox="1"/>
+          <p:nvPr/>
+        </p:nvSpPr>
+        <p:spPr>
+          <a:xfrm>
+            <a:off x="8229600" y="5449824"/>
+            <a:ext cx="1783080" cy="365760"/>
+          </a:xfrm>
+          <a:prstGeom prst="rect">
+            <a:avLst/>
+          </a:prstGeom>
+          <a:noFill/>
+          <a:ln/>
+        </p:spPr>
+        <p:txBody>
+          <a:bodyPr wrap="square" lIns="0" tIns="0" rIns="0" bIns="0" rtlCol="0" anchor="ctr"/>
+          <a:lstStyle/>
+          <a:p>
+            <a:pPr algn="ctr" indent="0" marL="0">
+              <a:buNone/>
+            </a:pPr>
+            <a:r>
+              <a:rPr lang="en-US" sz="2000" b="1" dirty="0">
+                <a:solidFill>
+                  <a:srgbClr val="16221A"/>
+                </a:solidFill>
+                <a:latin typeface="Yu Gothic" pitchFamily="34" charset="0"/>
+                <a:ea typeface="Yu Gothic" pitchFamily="34" charset="-122"/>
+                <a:cs typeface="Yu Gothic" pitchFamily="34" charset="-120"/>
+              </a:rPr>
+              <a:t>219件</a:t>
+            </a:r>
+            <a:endParaRPr lang="en-US" sz="2000" dirty="0"/>
+          </a:p>
+        </p:txBody>
+      </p:sp>
+      <p:sp>
+        <p:nvSpPr>
+          <p:cNvPr id="22" name="Text 19"/>
+          <p:cNvSpPr txBox="1"/>
+          <p:nvPr/>
+        </p:nvSpPr>
+        <p:spPr>
+          <a:xfrm>
+            <a:off x="8229600" y="5797296"/>
+            <a:ext cx="1783080" cy="219456"/>
+          </a:xfrm>
+          <a:prstGeom prst="rect">
+            <a:avLst/>
+          </a:prstGeom>
+          <a:noFill/>
+          <a:ln/>
+        </p:spPr>
+        <p:txBody>
+          <a:bodyPr wrap="square" lIns="0" tIns="0" rIns="0" bIns="0" rtlCol="0" anchor="ctr"/>
+          <a:lstStyle/>
+          <a:p>
+            <a:pPr algn="ctr" indent="0" marL="0">
+              <a:buNone/>
+            </a:pPr>
+            <a:r>
+              <a:rPr lang="en-US" sz="850" dirty="0">
+                <a:solidFill>
+                  <a:srgbClr val="72877A"/>
+                </a:solidFill>
+                <a:latin typeface="Yu Gothic" pitchFamily="34" charset="0"/>
+                <a:ea typeface="Yu Gothic" pitchFamily="34" charset="-122"/>
+                <a:cs typeface="Yu Gothic" pitchFamily="34" charset="-120"/>
+              </a:rPr>
+              <a:t>5倍</a:t>
+            </a:r>
+            <a:endParaRPr lang="en-US" sz="850" dirty="0"/>
+          </a:p>
+        </p:txBody>
+      </p:sp>
+      <p:sp>
+        <p:nvSpPr>
+          <p:cNvPr id="23" name="Shape 20"/>
+          <p:cNvSpPr/>
+          <p:nvPr/>
+        </p:nvSpPr>
+        <p:spPr>
+          <a:xfrm>
+            <a:off x="10149840" y="5157216"/>
+            <a:ext cx="1783080" cy="914400"/>
+          </a:xfrm>
+          <a:prstGeom prst="roundRect">
+            <a:avLst>
+              <a:gd name="adj" fmla="val 6000"/>
+            </a:avLst>
+          </a:prstGeom>
+          <a:solidFill>
+            <a:srgbClr val="FFFFFF"/>
+          </a:solidFill>
+          <a:ln w="12700">
+            <a:solidFill>
+              <a:srgbClr val="D8E0D5"/>
+            </a:solidFill>
+            <a:prstDash val="solid"/>
+          </a:ln>
+        </p:spPr>
+      </p:sp>
+      <p:sp>
+        <p:nvSpPr>
+          <p:cNvPr id="24" name="Text 21"/>
+          <p:cNvSpPr txBox="1"/>
+          <p:nvPr/>
+        </p:nvSpPr>
+        <p:spPr>
+          <a:xfrm>
+            <a:off x="10149840" y="5248656"/>
+            <a:ext cx="1783080" cy="219456"/>
+          </a:xfrm>
+          <a:prstGeom prst="rect">
+            <a:avLst/>
+          </a:prstGeom>
+          <a:noFill/>
+          <a:ln/>
+        </p:spPr>
+        <p:txBody>
+          <a:bodyPr wrap="square" lIns="0" tIns="0" rIns="0" bIns="0" rtlCol="0" anchor="ctr"/>
+          <a:lstStyle/>
+          <a:p>
+            <a:pPr algn="ctr" indent="0" marL="0">
+              <a:buNone/>
+            </a:pPr>
+            <a:r>
+              <a:rPr lang="en-US" sz="950" b="1" dirty="0">
+                <a:solidFill>
+                  <a:srgbClr val="72877A"/>
+                </a:solidFill>
+                <a:latin typeface="Yu Gothic" pitchFamily="34" charset="0"/>
+                <a:ea typeface="Yu Gothic" pitchFamily="34" charset="-122"/>
+                <a:cs typeface="Yu Gothic" pitchFamily="34" charset="-120"/>
+              </a:rPr>
+              <a:t>約750円 / 月</a:t>
+            </a:r>
+            <a:endParaRPr lang="en-US" sz="950" dirty="0"/>
+          </a:p>
+        </p:txBody>
+      </p:sp>
+      <p:sp>
+        <p:nvSpPr>
+          <p:cNvPr id="25" name="Text 22"/>
+          <p:cNvSpPr txBox="1"/>
+          <p:nvPr/>
+        </p:nvSpPr>
+        <p:spPr>
+          <a:xfrm>
+            <a:off x="10149840" y="5449824"/>
+            <a:ext cx="1783080" cy="365760"/>
+          </a:xfrm>
+          <a:prstGeom prst="rect">
+            <a:avLst/>
+          </a:prstGeom>
+          <a:noFill/>
+          <a:ln/>
+        </p:spPr>
+        <p:txBody>
+          <a:bodyPr wrap="square" lIns="0" tIns="0" rIns="0" bIns="0" rtlCol="0" anchor="ctr"/>
+          <a:lstStyle/>
+          <a:p>
+            <a:pPr algn="ctr" indent="0" marL="0">
+              <a:buNone/>
+            </a:pPr>
+            <a:r>
+              <a:rPr lang="en-US" sz="2000" b="1" dirty="0">
+                <a:solidFill>
+                  <a:srgbClr val="16221A"/>
+                </a:solidFill>
+                <a:latin typeface="Yu Gothic" pitchFamily="34" charset="0"/>
+                <a:ea typeface="Yu Gothic" pitchFamily="34" charset="-122"/>
+                <a:cs typeface="Yu Gothic" pitchFamily="34" charset="-120"/>
+              </a:rPr>
+              <a:t>549件</a:t>
+            </a:r>
+            <a:endParaRPr lang="en-US" sz="2000" dirty="0"/>
+          </a:p>
+        </p:txBody>
+      </p:sp>
+      <p:sp>
+        <p:nvSpPr>
+          <p:cNvPr id="26" name="Text 23"/>
+          <p:cNvSpPr txBox="1"/>
+          <p:nvPr/>
+        </p:nvSpPr>
+        <p:spPr>
+          <a:xfrm>
+            <a:off x="10149840" y="5797296"/>
+            <a:ext cx="1783080" cy="219456"/>
+          </a:xfrm>
+          <a:prstGeom prst="rect">
+            <a:avLst/>
+          </a:prstGeom>
+          <a:noFill/>
+          <a:ln/>
+        </p:spPr>
+        <p:txBody>
+          <a:bodyPr wrap="square" lIns="0" tIns="0" rIns="0" bIns="0" rtlCol="0" anchor="ctr"/>
+          <a:lstStyle/>
+          <a:p>
+            <a:pPr algn="ctr" indent="0" marL="0">
+              <a:buNone/>
+            </a:pPr>
+            <a:r>
+              <a:rPr lang="en-US" sz="850" dirty="0">
+                <a:solidFill>
+                  <a:srgbClr val="72877A"/>
+                </a:solidFill>
+                <a:latin typeface="Yu Gothic" pitchFamily="34" charset="0"/>
+                <a:ea typeface="Yu Gothic" pitchFamily="34" charset="-122"/>
+                <a:cs typeface="Yu Gothic" pitchFamily="34" charset="-120"/>
+              </a:rPr>
+              <a:t>12倍</a:t>
+            </a:r>
+            <a:endParaRPr lang="en-US" sz="850" dirty="0"/>
+          </a:p>
+        </p:txBody>
+      </p:sp>
+      <p:sp>
+        <p:nvSpPr>
+          <p:cNvPr id="27" name="Text 24"/>
           <p:cNvSpPr txBox="1"/>
           <p:nvPr/>
         </p:nvSpPr>
@@ -8977,7 +9634,7 @@
       </p:sp>
       <p:sp>
         <p:nvSpPr>
-          <p:cNvPr id="10" name="Text 7"/>
+          <p:cNvPr id="28" name="Text 25"/>
           <p:cNvSpPr txBox="1"/>
           <p:nvPr/>
         </p:nvSpPr>

--- a/hoshi-jungle-review-ai/docs/proposal/hoshi-jungle-proposal.pptx
+++ b/hoshi-jungle-review-ai/docs/proposal/hoshi-jungle-proposal.pptx
@@ -3893,7 +3893,7 @@
                 <a:ea typeface="Yu Gothic" pitchFamily="34" charset="-122"/>
                 <a:cs typeface="Yu Gothic" pitchFamily="34" charset="-120"/>
               </a:rPr>
-              <a:t>いただきません</a:t>
+              <a:t>なし</a:t>
             </a:r>
             <a:endParaRPr lang="en-US" sz="1900" dirty="0"/>
           </a:p>
@@ -7257,7 +7257,7 @@
                 <a:ea typeface="Yu Gothic" pitchFamily="34" charset="-122"/>
                 <a:cs typeface="Yu Gothic" pitchFamily="34" charset="-120"/>
               </a:rPr>
-              <a:t>管理費はいただきません</a:t>
+              <a:t>管理費はなし</a:t>
             </a:r>
             <a:endParaRPr lang="en-US" sz="3200" dirty="0"/>
           </a:p>
